--- a/01_FoundationProjects/MFL09_Encoder_Motor_Control/MFL09_Encoder_Motor_Control.pptx
+++ b/01_FoundationProjects/MFL09_Encoder_Motor_Control/MFL09_Encoder_Motor_Control.pptx
@@ -266,7 +266,7 @@
           <a:p>
             <a:fld id="{375049E3-AEF5-412D-9F98-5201579F9569}" type="datetimeFigureOut">
               <a:rPr lang="en-GB" smtClean="0"/>
-              <a:t>26/12/2025</a:t>
+              <a:t>18/01/2026</a:t>
             </a:fld>
             <a:endParaRPr lang="en-GB"/>
           </a:p>
@@ -466,7 +466,7 @@
           <a:p>
             <a:fld id="{375049E3-AEF5-412D-9F98-5201579F9569}" type="datetimeFigureOut">
               <a:rPr lang="en-GB" smtClean="0"/>
-              <a:t>26/12/2025</a:t>
+              <a:t>18/01/2026</a:t>
             </a:fld>
             <a:endParaRPr lang="en-GB"/>
           </a:p>
@@ -676,7 +676,7 @@
           <a:p>
             <a:fld id="{375049E3-AEF5-412D-9F98-5201579F9569}" type="datetimeFigureOut">
               <a:rPr lang="en-GB" smtClean="0"/>
-              <a:t>26/12/2025</a:t>
+              <a:t>18/01/2026</a:t>
             </a:fld>
             <a:endParaRPr lang="en-GB"/>
           </a:p>
@@ -876,7 +876,7 @@
           <a:p>
             <a:fld id="{375049E3-AEF5-412D-9F98-5201579F9569}" type="datetimeFigureOut">
               <a:rPr lang="en-GB" smtClean="0"/>
-              <a:t>26/12/2025</a:t>
+              <a:t>18/01/2026</a:t>
             </a:fld>
             <a:endParaRPr lang="en-GB"/>
           </a:p>
@@ -1152,7 +1152,7 @@
           <a:p>
             <a:fld id="{375049E3-AEF5-412D-9F98-5201579F9569}" type="datetimeFigureOut">
               <a:rPr lang="en-GB" smtClean="0"/>
-              <a:t>26/12/2025</a:t>
+              <a:t>18/01/2026</a:t>
             </a:fld>
             <a:endParaRPr lang="en-GB"/>
           </a:p>
@@ -1420,7 +1420,7 @@
           <a:p>
             <a:fld id="{375049E3-AEF5-412D-9F98-5201579F9569}" type="datetimeFigureOut">
               <a:rPr lang="en-GB" smtClean="0"/>
-              <a:t>26/12/2025</a:t>
+              <a:t>18/01/2026</a:t>
             </a:fld>
             <a:endParaRPr lang="en-GB"/>
           </a:p>
@@ -1835,7 +1835,7 @@
           <a:p>
             <a:fld id="{375049E3-AEF5-412D-9F98-5201579F9569}" type="datetimeFigureOut">
               <a:rPr lang="en-GB" smtClean="0"/>
-              <a:t>26/12/2025</a:t>
+              <a:t>18/01/2026</a:t>
             </a:fld>
             <a:endParaRPr lang="en-GB"/>
           </a:p>
@@ -1977,7 +1977,7 @@
           <a:p>
             <a:fld id="{375049E3-AEF5-412D-9F98-5201579F9569}" type="datetimeFigureOut">
               <a:rPr lang="en-GB" smtClean="0"/>
-              <a:t>26/12/2025</a:t>
+              <a:t>18/01/2026</a:t>
             </a:fld>
             <a:endParaRPr lang="en-GB"/>
           </a:p>
@@ -2090,7 +2090,7 @@
           <a:p>
             <a:fld id="{375049E3-AEF5-412D-9F98-5201579F9569}" type="datetimeFigureOut">
               <a:rPr lang="en-GB" smtClean="0"/>
-              <a:t>26/12/2025</a:t>
+              <a:t>18/01/2026</a:t>
             </a:fld>
             <a:endParaRPr lang="en-GB"/>
           </a:p>
@@ -2403,7 +2403,7 @@
           <a:p>
             <a:fld id="{375049E3-AEF5-412D-9F98-5201579F9569}" type="datetimeFigureOut">
               <a:rPr lang="en-GB" smtClean="0"/>
-              <a:t>26/12/2025</a:t>
+              <a:t>18/01/2026</a:t>
             </a:fld>
             <a:endParaRPr lang="en-GB"/>
           </a:p>
@@ -2692,7 +2692,7 @@
           <a:p>
             <a:fld id="{375049E3-AEF5-412D-9F98-5201579F9569}" type="datetimeFigureOut">
               <a:rPr lang="en-GB" smtClean="0"/>
-              <a:t>26/12/2025</a:t>
+              <a:t>18/01/2026</a:t>
             </a:fld>
             <a:endParaRPr lang="en-GB"/>
           </a:p>
@@ -2935,7 +2935,7 @@
           <a:p>
             <a:fld id="{375049E3-AEF5-412D-9F98-5201579F9569}" type="datetimeFigureOut">
               <a:rPr lang="en-GB" smtClean="0"/>
-              <a:t>26/12/2025</a:t>
+              <a:t>18/01/2026</a:t>
             </a:fld>
             <a:endParaRPr lang="en-GB"/>
           </a:p>
@@ -4005,7 +4005,7 @@
         <p:spPr>
           <a:xfrm>
             <a:off x="1141223" y="4725110"/>
-            <a:ext cx="4309253" cy="1200329"/>
+            <a:ext cx="4309253" cy="1477328"/>
           </a:xfrm>
           <a:prstGeom prst="rect">
             <a:avLst/>
@@ -4029,7 +4029,7 @@
               <a:rPr lang="en-GB" dirty="0">
                 <a:hlinkClick r:id="rId2"/>
               </a:rPr>
-              <a:t>https://github.com/info-zas/zas-robotics-motion/blob/main/01_FoundationProjects/MFL09/MFL09/MFL09.ino</a:t>
+              <a:t>https://github.com/info-zas/zas-robotics-motion/tree/main/01_FoundationProjects/MFL09_Encoder_Motor_Control/MFL09_Encoder_Motor_Control</a:t>
             </a:r>
             <a:endParaRPr lang="en-GB" dirty="0"/>
           </a:p>
@@ -4145,8 +4145,8 @@
         </p:nvSpPr>
         <p:spPr bwMode="auto">
           <a:xfrm>
-            <a:off x="1141223" y="4294199"/>
-            <a:ext cx="3883520" cy="369332"/>
+            <a:off x="1049518" y="3958815"/>
+            <a:ext cx="4492661" cy="646331"/>
           </a:xfrm>
           <a:prstGeom prst="rect">
             <a:avLst/>
@@ -4258,7 +4258,7 @@
             </a:pPr>
             <a:r>
               <a:rPr lang="en-GB" b="1" dirty="0"/>
-              <a:t>Code for Lesson MFL09 (MFL09.ino):</a:t>
+              <a:t>Code for Lesson MFL09 (MFL09_Encoder_Motor_Control.ino):</a:t>
             </a:r>
           </a:p>
         </p:txBody>
@@ -4565,7 +4565,7 @@
           <a:p>
             <a:r>
               <a:rPr lang="en-GB" sz="1800" b="1" dirty="0"/>
-              <a:t>Execute the code (MFL09.ino) in the motion creative board</a:t>
+              <a:t>Execute the code in the motion creative board</a:t>
             </a:r>
           </a:p>
         </p:txBody>
@@ -4877,10 +4877,10 @@
       </p:sp>
       <p:sp>
         <p:nvSpPr>
-          <p:cNvPr id="4" name="TextBox 3">
-            <a:extLst>
-              <a:ext uri="{FF2B5EF4-FFF2-40B4-BE49-F238E27FC236}">
-                <a16:creationId xmlns:a16="http://schemas.microsoft.com/office/drawing/2014/main" id="{B5EE6B0E-1C16-A5AD-1CE4-ACCEB3CB9021}"/>
+          <p:cNvPr id="8" name="TextBox 7">
+            <a:extLst>
+              <a:ext uri="{FF2B5EF4-FFF2-40B4-BE49-F238E27FC236}">
+                <a16:creationId xmlns:a16="http://schemas.microsoft.com/office/drawing/2014/main" id="{258D580B-C2BD-179E-ED9F-AA588111574E}"/>
               </a:ext>
             </a:extLst>
           </p:cNvPr>
@@ -4889,8 +4889,8 @@
         </p:nvSpPr>
         <p:spPr>
           <a:xfrm>
-            <a:off x="1141223" y="4725110"/>
-            <a:ext cx="4309253" cy="1200329"/>
+            <a:off x="1049520" y="2786369"/>
+            <a:ext cx="4309253" cy="1477328"/>
           </a:xfrm>
           <a:prstGeom prst="rect">
             <a:avLst/>
@@ -4914,7 +4914,7 @@
               <a:rPr lang="en-GB" dirty="0">
                 <a:hlinkClick r:id="rId4"/>
               </a:rPr>
-              <a:t>https://github.com/info-zas/zas-robotics-motion/blob/main/01_FoundationProjects/MFL09/MFL09/MFL09.ino</a:t>
+              <a:t>https://github.com/info-zas/zas-robotics-motion/tree/main/01_FoundationProjects/MFL09_Encoder_Motor_Control/MFL09_Encoder_Motor_Control</a:t>
             </a:r>
             <a:endParaRPr lang="en-GB" dirty="0"/>
           </a:p>
@@ -4925,10 +4925,10 @@
       </p:sp>
       <p:sp>
         <p:nvSpPr>
-          <p:cNvPr id="7" name="TextBox 6">
-            <a:extLst>
-              <a:ext uri="{FF2B5EF4-FFF2-40B4-BE49-F238E27FC236}">
-                <a16:creationId xmlns:a16="http://schemas.microsoft.com/office/drawing/2014/main" id="{292334F6-B1EC-0BD9-FD26-A66B07EDDA88}"/>
+          <p:cNvPr id="13" name="TextBox 12">
+            <a:extLst>
+              <a:ext uri="{FF2B5EF4-FFF2-40B4-BE49-F238E27FC236}">
+                <a16:creationId xmlns:a16="http://schemas.microsoft.com/office/drawing/2014/main" id="{C7CE8D4E-1704-1E15-F674-FF087DA8BAFE}"/>
               </a:ext>
             </a:extLst>
           </p:cNvPr>
@@ -4937,8 +4937,8 @@
         </p:nvSpPr>
         <p:spPr bwMode="auto">
           <a:xfrm>
-            <a:off x="1141223" y="4294199"/>
-            <a:ext cx="3883520" cy="369332"/>
+            <a:off x="957815" y="2020074"/>
+            <a:ext cx="4492661" cy="646331"/>
           </a:xfrm>
           <a:prstGeom prst="rect">
             <a:avLst/>
@@ -5050,7 +5050,7 @@
             </a:pPr>
             <a:r>
               <a:rPr lang="en-GB" b="1" dirty="0"/>
-              <a:t>Code for Lesson MFL09 (MFL09.ino):</a:t>
+              <a:t>Code for Lesson MFL09 (MFL09_Encoder_Motor_Control.ino):</a:t>
             </a:r>
           </a:p>
         </p:txBody>
@@ -5115,7 +5115,7 @@
                 <a:ea typeface="Calibri Light" panose="020F0302020204030204" pitchFamily="34" charset="0"/>
                 <a:cs typeface="Calibri Light" panose="020F0302020204030204" pitchFamily="34" charset="0"/>
               </a:rPr>
-              <a:t>MFL09_a : </a:t>
+              <a:t>MFL09 : </a:t>
             </a:r>
             <a:br>
               <a:rPr lang="en-GB" b="1" dirty="0">
@@ -5136,7 +5136,7 @@
                 <a:ea typeface="Calibri Light" panose="020F0302020204030204" pitchFamily="34" charset="0"/>
                 <a:cs typeface="Calibri Light" panose="020F0302020204030204" pitchFamily="34" charset="0"/>
               </a:rPr>
-              <a:t>Encoder Motor Control with TB6612</a:t>
+              <a:t>Encoder Motor Control with Hand</a:t>
             </a:r>
             <a:endParaRPr lang="en-GB" dirty="0"/>
           </a:p>
@@ -5156,8 +5156,8 @@
         </p:nvSpPr>
         <p:spPr bwMode="auto">
           <a:xfrm>
-            <a:off x="1114480" y="4340364"/>
-            <a:ext cx="3883520" cy="2308324"/>
+            <a:off x="1114479" y="4340364"/>
+            <a:ext cx="4681728" cy="2062103"/>
           </a:xfrm>
           <a:prstGeom prst="rect">
             <a:avLst/>
@@ -5273,33 +5273,41 @@
               <a:defRPr/>
             </a:pPr>
             <a:r>
-              <a:rPr lang="en-GB" b="1" dirty="0"/>
-              <a:t>Code for Lesson MFL09_a (MFL09_a.ino):</a:t>
+              <a:rPr lang="en-GB" sz="1600" b="1" dirty="0"/>
+              <a:t>Code for Lesson MFL09 (</a:t>
+            </a:r>
+            <a:r>
+              <a:rPr lang="en-US" sz="1600" b="1" dirty="0"/>
+              <a:t>MFL09_Encoder_Motor_Control_by_Hand</a:t>
+            </a:r>
+            <a:r>
+              <a:rPr lang="en-GB" sz="1600" b="1" dirty="0"/>
+              <a:t>.ino):</a:t>
             </a:r>
           </a:p>
           <a:p>
             <a:pPr>
               <a:defRPr/>
             </a:pPr>
-            <a:endParaRPr lang="en-GB" b="1" dirty="0"/>
+            <a:endParaRPr lang="en-GB" sz="1600" b="1" dirty="0"/>
           </a:p>
           <a:p>
             <a:pPr>
               <a:defRPr/>
             </a:pPr>
             <a:r>
-              <a:rPr lang="en-GB" b="1" dirty="0">
+              <a:rPr lang="en-GB" sz="1600" b="1" dirty="0">
                 <a:hlinkClick r:id="rId2"/>
               </a:rPr>
-              <a:t>https://github.com/info-zas/zas-robotics-motion/blob/main/01_FoundationProjects/MFL09/MFL09_a/MFL09_a.ino</a:t>
-            </a:r>
-            <a:endParaRPr lang="en-GB" b="1" dirty="0"/>
+              <a:t>https://github.com/info-zas/zas-robotics-motion/tree/main/01_FoundationProjects/MFL09_Encoder_Motor_Control/MFL09_Encoder_Motor_Control_by_Hand</a:t>
+            </a:r>
+            <a:endParaRPr lang="en-GB" sz="1600" b="1" dirty="0"/>
           </a:p>
           <a:p>
             <a:pPr>
               <a:defRPr/>
             </a:pPr>
-            <a:endParaRPr lang="en-GB" b="1" dirty="0"/>
+            <a:endParaRPr lang="en-GB" sz="1600" b="1" dirty="0"/>
           </a:p>
         </p:txBody>
       </p:sp>
